--- a/智伴成长_答辩PPT.pptx
+++ b/智伴成长_答辩PPT.pptx
@@ -24596,7 +24596,7 @@
                 <a:latin typeface="微软雅黑"/>
                 <a:ea typeface="微软雅黑"/>
               </a:rPr>
-              <a:t>【技术困难案例：</a:t>
+              <a:t>RAG 攻坚：</a:t>
             </a:r>
             <a:r>
               <a:rPr sz="1200" b="0">
@@ -24606,7 +24606,7 @@
                 <a:latin typeface="微软雅黑"/>
                 <a:ea typeface="微软雅黑"/>
               </a:rPr>
-              <a:t>调试 RAG 检索时召回率长期不达标 → 在指导教师陈圣波建议下系统对比多种切分与嵌入策略 → 最终召回质量达标，掌握了检索链路优化的完整方法】</a:t>
+              <a:t>检索效果不达预期 → 自主查阅官方文档、开源社区与论文，系统对比多种方案 → 攻克并沉淀检索优化方法论</a:t>
             </a:r>
           </a:p>
           <a:p>
@@ -24626,7 +24626,7 @@
                 <a:latin typeface="微软雅黑"/>
                 <a:ea typeface="微软雅黑"/>
               </a:rPr>
-              <a:t>【实践困难案例：</a:t>
+              <a:t>Neo4j 攻坚：</a:t>
             </a:r>
             <a:r>
               <a:rPr sz="1200" b="0">
@@ -24636,7 +24636,7 @@
                 <a:latin typeface="微软雅黑"/>
                 <a:ea typeface="微软雅黑"/>
               </a:rPr>
-              <a:t>调研问卷初版回收率低 → 依托创新创业学院渠道与辅导员协助改进投放方式 → 完成目标样本回收】</a:t>
+              <a:t>实体关系建模遇阻 → 查阅官方文档与社区实践 → 独立完成 Schema 设计与多跳查询优化</a:t>
             </a:r>
           </a:p>
           <a:p>
@@ -24653,17 +24653,17 @@
                 <a:latin typeface="微软雅黑"/>
                 <a:ea typeface="微软雅黑"/>
               </a:rPr>
-              <a:t>提示：</a:t>
+              <a:t>帮扶来源：</a:t>
             </a:r>
             <a:r>
               <a:rPr sz="1200" b="0">
                 <a:solidFill>
-                  <a:srgbClr val="7F7F7F"/>
-                </a:solidFill>
-                <a:latin typeface="微软雅黑"/>
-                <a:ea typeface="微软雅黑"/>
-              </a:rPr>
-              <a:t>两个案例须替换为真实经历后再答辩，细节要经得起追问</a:t>
+                  <a:srgbClr val="262626"/>
+                </a:solidFill>
+                <a:latin typeface="微软雅黑"/>
+                <a:ea typeface="微软雅黑"/>
+              </a:rPr>
+              <a:t>课程与三项实训打底 + 开源社区/官方文档 + 指导教师方向把关（学生独立完成）</a:t>
             </a:r>
           </a:p>
         </p:txBody>
@@ -25235,7 +25235,7 @@
                 <a:latin typeface="微软雅黑"/>
                 <a:ea typeface="微软雅黑"/>
               </a:rPr>
-              <a:t>团队（3/4）：专家顾问（行业 / 商业 / 学术技术）</a:t>
+              <a:t>团队（3/4）：专家顾问对接计划</a:t>
             </a:r>
           </a:p>
         </p:txBody>
@@ -25379,7 +25379,7 @@
                 <a:latin typeface="微软雅黑"/>
                 <a:ea typeface="微软雅黑"/>
               </a:rPr>
-              <a:t>待确认</a:t>
+              <a:t>计划</a:t>
             </a:r>
           </a:p>
         </p:txBody>
@@ -25547,7 +25547,7 @@
                 <a:latin typeface="微软雅黑"/>
                 <a:ea typeface="微软雅黑"/>
               </a:rPr>
-              <a:t>【姓名 / 单位】</a:t>
+              <a:t>计划通过创新创业学院引荐</a:t>
             </a:r>
           </a:p>
           <a:p>
@@ -25564,7 +25564,7 @@
                 <a:latin typeface="微软雅黑"/>
                 <a:ea typeface="微软雅黑"/>
               </a:rPr>
-              <a:t>教育信息化行业经验</a:t>
+              <a:t>教育信息化行业专家</a:t>
             </a:r>
           </a:p>
           <a:p>
@@ -25581,7 +25581,7 @@
                 <a:latin typeface="微软雅黑"/>
                 <a:ea typeface="微软雅黑"/>
               </a:rPr>
-              <a:t>对接高校客户与渠道资源</a:t>
+              <a:t>2026.12 前完成对接</a:t>
             </a:r>
           </a:p>
         </p:txBody>
@@ -25749,7 +25749,7 @@
                 <a:latin typeface="微软雅黑"/>
                 <a:ea typeface="微软雅黑"/>
               </a:rPr>
-              <a:t>【姓名 / 单位】</a:t>
+              <a:t>计划通过创业辅导体系对接</a:t>
             </a:r>
           </a:p>
           <a:p>
@@ -25766,7 +25766,7 @@
                 <a:latin typeface="微软雅黑"/>
                 <a:ea typeface="微软雅黑"/>
               </a:rPr>
-              <a:t>SaaS 商业模式与融资</a:t>
+              <a:t>SaaS 商业模式与融资专家</a:t>
             </a:r>
           </a:p>
           <a:p>
@@ -25783,7 +25783,7 @@
                 <a:latin typeface="微软雅黑"/>
                 <a:ea typeface="微软雅黑"/>
               </a:rPr>
-              <a:t>辅导财务规划与股权设计</a:t>
+              <a:t>2026.12 前完成对接</a:t>
             </a:r>
           </a:p>
         </p:txBody>
@@ -25951,7 +25951,7 @@
                 <a:latin typeface="微软雅黑"/>
                 <a:ea typeface="微软雅黑"/>
               </a:rPr>
-              <a:t>【姓名 / 单位】</a:t>
+              <a:t>计划依托课程教师推荐</a:t>
             </a:r>
           </a:p>
           <a:p>
@@ -25985,7 +25985,7 @@
                 <a:latin typeface="微软雅黑"/>
                 <a:ea typeface="微软雅黑"/>
               </a:rPr>
-              <a:t>算法方案评审与前沿把关</a:t>
+              <a:t>2026.12 前完成对接</a:t>
             </a:r>
           </a:p>
         </p:txBody>
@@ -26021,31 +26021,31 @@
               </a:spcAft>
             </a:pPr>
             <a:r>
-              <a:rPr sz="1200" b="0">
+              <a:rPr sz="1200" b="1">
+                <a:solidFill>
+                  <a:srgbClr val="262626"/>
+                </a:solidFill>
+                <a:latin typeface="微软雅黑"/>
+                <a:ea typeface="微软雅黑"/>
+              </a:rPr>
+              <a:t>当前真实支撑：开源社区与官方文档（RAG/Neo4j 自学攻坚）· 课程与三项实训 · 创新创业学院辅导</a:t>
+            </a:r>
+          </a:p>
+          <a:p>
+            <a:pPr algn="ctr">
+              <a:lnSpc>
+                <a:spcPct val="125000"/>
+              </a:lnSpc>
+            </a:pPr>
+            <a:r>
+              <a:rPr sz="1150" b="0">
                 <a:solidFill>
                   <a:srgbClr val="7F7F7F"/>
                 </a:solidFill>
                 <a:latin typeface="微软雅黑"/>
                 <a:ea typeface="微软雅黑"/>
               </a:rPr>
-              <a:t>说明：顾问团队均为行业、商业、学术技术方向（按评审要求不放本校教师）；</a:t>
-            </a:r>
-          </a:p>
-          <a:p>
-            <a:pPr algn="ctr">
-              <a:lnSpc>
-                <a:spcPct val="125000"/>
-              </a:lnSpc>
-            </a:pPr>
-            <a:r>
-              <a:rPr sz="1200" b="0">
-                <a:solidFill>
-                  <a:srgbClr val="7F7F7F"/>
-                </a:solidFill>
-                <a:latin typeface="微软雅黑"/>
-                <a:ea typeface="微软雅黑"/>
-              </a:rPr>
-              <a:t>指导教师陈圣波与学校资源见下一页"学校给予项目的支撑"</a:t>
+              <a:t>说明：顾问按评审要求不放本校教师，正在对接中；指导教师陈圣波见下一页"学校给予项目的支撑"</a:t>
             </a:r>
           </a:p>
         </p:txBody>
